--- a/curso/pptx/S11.pptx
+++ b/curso/pptx/S11.pptx
@@ -7513,7 +7513,7 @@
                 </a:solidFill>
                 <a:latin typeface="Nunito Sans"/>
               </a:rPr>
-              <a:t>Ayuda a entender</a:t>
+              <a:t>帮助理解</a:t>
             </a:r>
           </a:p>
           <a:p>
@@ -7538,7 +7538,7 @@
                 </a:solidFill>
                 <a:latin typeface="Nunito Sans"/>
               </a:rPr>
-              <a:t>Muchos ejemplos hacen una idea más probable</a:t>
+              <a:t>很多例子让一个想法更有可能</a:t>
             </a:r>
           </a:p>
           <a:p>
@@ -7563,7 +7563,7 @@
                 </a:solidFill>
                 <a:latin typeface="Nunito Sans"/>
               </a:rPr>
-              <a:t>Pero no demuestran un «todos» （第10课）</a:t>
+              <a:t>但它们不能证明一个“所有”（第 10 课）</a:t>
             </a:r>
           </a:p>
         </p:txBody>
@@ -7815,7 +7815,7 @@
                 </a:solidFill>
                 <a:latin typeface="Nunito Sans"/>
               </a:rPr>
-              <a:t>Tumba frases con «todos», «nadie», «siempre», «nunca»</a:t>
+              <a:t>能推翻带有“所有”“没有人”“总是”“从不”的句子</a:t>
             </a:r>
           </a:p>
           <a:p>
@@ -7840,7 +7840,7 @@
                 </a:solidFill>
                 <a:latin typeface="Nunito Sans"/>
               </a:rPr>
-              <a:t>Basta uno</a:t>
+              <a:t>只要一个</a:t>
             </a:r>
             <a:r>
               <a:rPr sz="2800" b="0">
@@ -7849,7 +7849,7 @@
                 </a:solidFill>
                 <a:latin typeface="Nunito Sans"/>
               </a:rPr>
-              <a:t> para tumbar un «todos»</a:t>
+              <a:t>，就能推翻一个“所有”</a:t>
             </a:r>
           </a:p>
           <a:p>
@@ -7874,7 +7874,7 @@
                 </a:solidFill>
                 <a:latin typeface="Nunito Sans"/>
               </a:rPr>
-              <a:t>«Todos los gatos odian el agua» → un gato que nada</a:t>
+              <a:t>“所有的猫都讨厌水” → 一只会游泳的猫</a:t>
             </a:r>
           </a:p>
         </p:txBody>
@@ -8126,7 +8126,7 @@
                 </a:solidFill>
                 <a:latin typeface="Nunito Sans"/>
               </a:rPr>
-              <a:t>«Si el casco protege en la bici, también protegerá en el patinete»</a:t>
+              <a:t>“如果骑自行车戴头盔能保护你，那么骑滑板车时头盔也会保护你”</a:t>
             </a:r>
           </a:p>
           <a:p>
@@ -8151,7 +8151,7 @@
                 </a:solidFill>
                 <a:latin typeface="Nunito Sans"/>
               </a:rPr>
-              <a:t>Es buena si se parecen </a:t>
+              <a:t>如果它们</a:t>
             </a:r>
             <a:r>
               <a:rPr sz="2800" b="1">
@@ -8160,7 +8160,16 @@
                 </a:solidFill>
                 <a:latin typeface="Nunito Sans"/>
               </a:rPr>
-              <a:t>en lo que importa</a:t>
+              <a:t>在重要的地方</a:t>
+            </a:r>
+            <a:r>
+              <a:rPr sz="2800" b="0">
+                <a:solidFill>
+                  <a:srgbClr val="1F2A44"/>
+                </a:solidFill>
+                <a:latin typeface="Nunito Sans"/>
+              </a:rPr>
+              <a:t>相似，就是好类比</a:t>
             </a:r>
           </a:p>
           <a:p>
@@ -8185,7 +8194,7 @@
                 </a:solidFill>
                 <a:latin typeface="Nunito Sans"/>
               </a:rPr>
-              <a:t>Como la inducción: da una conclusión probable, no segura</a:t>
+              <a:t>和归纳一样：得出的是有可能的结论，不是确定的</a:t>
             </a:r>
           </a:p>
         </p:txBody>

--- a/curso/pptx/S11.pptx
+++ b/curso/pptx/S11.pptx
@@ -4130,7 +4130,7 @@
                 </a:solidFill>
                 <a:latin typeface="Nunito Sans"/>
               </a:rPr>
-              <a:t>艾托：“我们班没有人是因为喜欢才读书的。”玛亚伦：“我这个暑假读了三本，没人逼我。”</a:t>
+              <a:t>一个男孩：“我们班没有人是因为喜欢才读书的。”一个女孩：“我这个暑假读了三本，没人逼我。”</a:t>
             </a:r>
           </a:p>
         </p:txBody>
@@ -4178,7 +4178,7 @@
                 </a:solidFill>
                 <a:latin typeface="Nunito Sans"/>
               </a:rPr>
-              <a:t>艾托的句子是一般性的：“没有人”。</a:t>
+              <a:t>这个男孩的句子是一般性的：“没有人”。</a:t>
             </a:r>
           </a:p>
           <a:p>
@@ -4203,7 +4203,7 @@
                 </a:solidFill>
                 <a:latin typeface="Nunito Sans"/>
               </a:rPr>
-              <a:t>玛亚伦是一个相反的例子：一个</a:t>
+              <a:t>这个女孩是一个相反的例子：一个</a:t>
             </a:r>
             <a:r>
               <a:rPr sz="2400" b="1">
@@ -4271,7 +4271,7 @@
                 </a:solidFill>
                 <a:latin typeface="Nunito Sans"/>
               </a:rPr>
-              <a:t>结论：艾托的话是假的。他可以说“很少人”，但不能说“没有人”。</a:t>
+              <a:t>结论：这个男孩的话是假的。他可以说“很少人”，但不能说“没有人”。</a:t>
             </a:r>
           </a:p>
         </p:txBody>
@@ -4457,7 +4457,7 @@
                 </a:solidFill>
                 <a:latin typeface="Nunito Sans"/>
               </a:rPr>
-              <a:t>凯文：“所有的油管博主都很有钱：你看这五个，他们都有大房子。”</a:t>
+              <a:t>一个男孩：“所有的油管博主都很有钱：你看这五个，他们都有大房子。”</a:t>
             </a:r>
           </a:p>
         </p:txBody>
@@ -4505,7 +4505,7 @@
                 </a:solidFill>
                 <a:latin typeface="Nunito Sans"/>
               </a:rPr>
-              <a:t>凯文给了五个</a:t>
+              <a:t>这个男孩给了五个</a:t>
             </a:r>
             <a:r>
               <a:rPr sz="2400" b="1">
@@ -5517,7 +5517,7 @@
                 </a:solidFill>
                 <a:latin typeface="Nunito Sans"/>
               </a:rPr>
-              <a:t>蕾雷：“狗都喜欢出去散步。”凯文：“我家的狗讨厌散步：它躲到床底下。”</a:t>
+              <a:t>一个女孩：“狗都喜欢出去散步。”一个男孩：“我家的狗讨厌散步：它躲到床底下。”</a:t>
             </a:r>
           </a:p>
         </p:txBody>
@@ -5565,7 +5565,7 @@
                 </a:solidFill>
                 <a:latin typeface="Nunito Sans"/>
               </a:rPr>
-              <a:t>凯文有一个反例。蕾雷的话是假的吗？</a:t>
+              <a:t>这个男孩有一个反例。这个女孩的话是假的吗？</a:t>
             </a:r>
           </a:p>
           <a:p>
@@ -5590,7 +5590,7 @@
                 </a:solidFill>
                 <a:latin typeface="Nunito Sans"/>
               </a:rPr>
-              <a:t>蕾雷没有说“所有的狗”：她说的是狗</a:t>
+              <a:t>这个女孩没有说“所有的狗”：她说的是狗</a:t>
             </a:r>
             <a:r>
               <a:rPr sz="2400" b="1">
@@ -7100,7 +7100,7 @@
                 </a:solidFill>
                 <a:latin typeface="Nunito Sans"/>
               </a:rPr>
-              <a:t>奥马尔说：“所有的猫都讨厌水。”蕾雷给他看了一段视频，她的猫正悠闲地游泳。</a:t>
+              <a:t>一个男孩说：“所有的猫都讨厌水。”一个女孩给他看了一段视频，她的猫正悠闲地游泳。</a:t>
             </a:r>
           </a:p>
         </p:txBody>
@@ -7139,7 +7139,7 @@
                 </a:solidFill>
                 <a:latin typeface="Nunito Sans"/>
               </a:rPr>
-              <a:t>奥马尔的这句话有什么问题？</a:t>
+              <a:t>这个男孩的这句话有什么问题？</a:t>
             </a:r>
           </a:p>
         </p:txBody>
